--- a/classes/parte-2-criptografia-aplicada/051-funciones-hash-sha-2-sha-3-y-sus-propiedades/clase-051-presentacion.pptx
+++ b/classes/parte-2-criptografia-aplicada/051-funciones-hash-sha-2-sha-3-y-sus-propiedades/clase-051-presentacion.pptx
@@ -17,6 +17,9 @@
     <p:sldId id="265" r:id="rId16"/>
     <p:sldId id="266" r:id="rId17"/>
     <p:sldId id="267" r:id="rId18"/>
+    <p:sldId id="268" r:id="rId19"/>
+    <p:sldId id="269" r:id="rId20"/>
+    <p:sldId id="270" r:id="rId21"/>
   </p:sldIdLst>
   <p:sldSz cx="9144000" cy="6858000" type="screen4x3"/>
   <p:notesSz cx="6858000" cy="9144000"/>
@@ -3198,7 +3201,7 @@
                   <a:srgbClr val="0B3D2E"/>
                 </a:solidFill>
               </a:rPr>
-              <a:t>⚠️ Errores comunes</a:t>
+              <a:t>✍️ Ejercicios</a:t>
             </a:r>
           </a:p>
         </p:txBody>
@@ -3236,67 +3239,82 @@
                   <a:srgbClr val="22282E"/>
                 </a:solidFill>
               </a:rPr>
-              <a:t>•  Usar MD5/SHA-1 para integridad de seguridad — Rotos; migra a SHA-256/SHA-3</a:t>
-            </a:r>
-          </a:p>
-          <a:p>
-            <a:pPr>
-              <a:spcAft>
-                <a:spcPts val="600"/>
-              </a:spcAft>
-            </a:pPr>
-            <a:r>
-              <a:rPr sz="1500">
-                <a:solidFill>
-                  <a:srgbClr val="22282E"/>
-                </a:solidFill>
-              </a:rPr>
-              <a:t>•  "Ciframos con SHA-256" — Un hash no cifra; usa AES/ChaCha20</a:t>
-            </a:r>
-          </a:p>
-          <a:p>
-            <a:pPr>
-              <a:spcAft>
-                <a:spcPts val="600"/>
-              </a:spcAft>
-            </a:pPr>
-            <a:r>
-              <a:rPr sz="1500">
-                <a:solidFill>
-                  <a:srgbClr val="22282E"/>
-                </a:solidFill>
-              </a:rPr>
-              <a:t>•  hash(clave\ — \</a:t>
-            </a:r>
-          </a:p>
-          <a:p>
-            <a:pPr>
-              <a:spcAft>
-                <a:spcPts val="600"/>
-              </a:spcAft>
-            </a:pPr>
-            <a:r>
-              <a:rPr sz="1500">
-                <a:solidFill>
-                  <a:srgbClr val="22282E"/>
-                </a:solidFill>
-              </a:rPr>
-              <a:t>•  Hash de contraseña con SHA-256 simple — Demasiado rápido; usa Argon2/bcrypt (clase 057)</a:t>
-            </a:r>
-          </a:p>
-          <a:p>
-            <a:pPr>
-              <a:spcAft>
-                <a:spcPts val="600"/>
-              </a:spcAft>
-            </a:pPr>
-            <a:r>
-              <a:rPr sz="1500">
-                <a:solidFill>
-                  <a:srgbClr val="22282E"/>
-                </a:solidFill>
-              </a:rPr>
-              <a:t>•  Comparar hashes con == en contexto sensible — Riesgo de timing; usa comparación constante</a:t>
+              <a:t>•  Calcula cuántos hashes necesitas para una colisión al 50 % en SHA-256 (paradoja del cumpleaños).</a:t>
+            </a:r>
+          </a:p>
+          <a:p>
+            <a:pPr>
+              <a:spcAft>
+                <a:spcPts val="600"/>
+              </a:spcAft>
+            </a:pPr>
+            <a:r>
+              <a:rPr sz="1500">
+                <a:solidFill>
+                  <a:srgbClr val="22282E"/>
+                </a:solidFill>
+              </a:rPr>
+              <a:t>•  Verifica la integridad de una descarga comparando su SHA-256 publicado.</a:t>
+            </a:r>
+          </a:p>
+          <a:p>
+            <a:pPr>
+              <a:spcAft>
+                <a:spcPts val="600"/>
+              </a:spcAft>
+            </a:pPr>
+            <a:r>
+              <a:rPr sz="1500">
+                <a:solidFill>
+                  <a:srgbClr val="22282E"/>
+                </a:solidFill>
+              </a:rPr>
+              <a:t>•  Explica por qué un hash no sirve para cifrar (no es reversible ni tiene clave).</a:t>
+            </a:r>
+          </a:p>
+          <a:p>
+            <a:pPr>
+              <a:spcAft>
+                <a:spcPts val="600"/>
+              </a:spcAft>
+            </a:pPr>
+            <a:r>
+              <a:rPr sz="1500">
+                <a:solidFill>
+                  <a:srgbClr val="22282E"/>
+                </a:solidFill>
+              </a:rPr>
+              <a:t>•  Compara la velocidad de SHA-256, SHA3-256 y BLAKE2b en tu máquina.</a:t>
+            </a:r>
+          </a:p>
+          <a:p>
+            <a:pPr>
+              <a:spcAft>
+                <a:spcPts val="600"/>
+              </a:spcAft>
+            </a:pPr>
+            <a:r>
+              <a:rPr sz="1500">
+                <a:solidFill>
+                  <a:srgbClr val="22282E"/>
+                </a:solidFill>
+              </a:rPr>
+              <a:t>•  Investiga el ataque SHAttered contra SHA-1 y su impacto en Git.</a:t>
+            </a:r>
+          </a:p>
+          <a:p>
+            <a:pPr>
+              <a:spcAft>
+                <a:spcPts val="600"/>
+              </a:spcAft>
+            </a:pPr>
+            <a:r>
+              <a:rPr sz="1500">
+                <a:solidFill>
+                  <a:srgbClr val="22282E"/>
+                </a:solidFill>
+              </a:rPr>
+              <a:t>•  Diseña un esquema de "prueba de descarga" con árbol de Merkle.</a:t>
             </a:r>
           </a:p>
         </p:txBody>
@@ -3347,7 +3365,7 @@
                   <a:srgbClr val="0B3D2E"/>
                 </a:solidFill>
               </a:rPr>
-              <a:t>❓ Preguntas frecuentes</a:t>
+              <a:t>📝 Reto verificable</a:t>
             </a:r>
           </a:p>
         </p:txBody>
@@ -3385,82 +3403,7 @@
                   <a:srgbClr val="22282E"/>
                 </a:solidFill>
               </a:rPr>
-              <a:t>•  ❓ ¿SHA-256 o SHA-3?</a:t>
-            </a:r>
-          </a:p>
-          <a:p>
-            <a:pPr>
-              <a:spcAft>
-                <a:spcPts val="600"/>
-              </a:spcAft>
-            </a:pPr>
-            <a:r>
-              <a:rPr sz="1500">
-                <a:solidFill>
-                  <a:srgbClr val="22282E"/>
-                </a:solidFill>
-              </a:rPr>
-              <a:t>•  Ambos son seguros. SHA-3 aporta diversidad de diseño e inmunidad a extensión de longitud; SHA-2 sigue siendo perfectamente válido.</a:t>
-            </a:r>
-          </a:p>
-          <a:p>
-            <a:pPr>
-              <a:spcAft>
-                <a:spcPts val="600"/>
-              </a:spcAft>
-            </a:pPr>
-            <a:r>
-              <a:rPr sz="1500">
-                <a:solidFill>
-                  <a:srgbClr val="22282E"/>
-                </a:solidFill>
-              </a:rPr>
-              <a:t>•  ❓ ¿Un hash garantiza que nadie modificó el archivo?</a:t>
-            </a:r>
-          </a:p>
-          <a:p>
-            <a:pPr>
-              <a:spcAft>
-                <a:spcPts val="600"/>
-              </a:spcAft>
-            </a:pPr>
-            <a:r>
-              <a:rPr sz="1500">
-                <a:solidFill>
-                  <a:srgbClr val="22282E"/>
-                </a:solidFill>
-              </a:rPr>
-              <a:t>•  Solo si el hash se obtuvo por un canal confiable; si el atacante controla ambos, puede sustituirlos. Combínalo con firmas.</a:t>
-            </a:r>
-          </a:p>
-          <a:p>
-            <a:pPr>
-              <a:spcAft>
-                <a:spcPts val="600"/>
-              </a:spcAft>
-            </a:pPr>
-            <a:r>
-              <a:rPr sz="1500">
-                <a:solidFill>
-                  <a:srgbClr val="22282E"/>
-                </a:solidFill>
-              </a:rPr>
-              <a:t>•  ❓ ¿Por qué las colisiones importan si "es improbable"?</a:t>
-            </a:r>
-          </a:p>
-          <a:p>
-            <a:pPr>
-              <a:spcAft>
-                <a:spcPts val="600"/>
-              </a:spcAft>
-            </a:pPr>
-            <a:r>
-              <a:rPr sz="1500">
-                <a:solidFill>
-                  <a:srgbClr val="22282E"/>
-                </a:solidFill>
-              </a:rPr>
-              <a:t>•  Porque atacantes las fabrican intencionadamente (SHAttered); afectan firmas y control de versiones.</a:t>
+              <a:t>•  Construye un verificador de integridad que, dado un directorio, genere un manifiesto con el SHA-256 de cada archivo y luego detecte cualquier alteración. Criterio de aceptación: si modificas un solo…</a:t>
             </a:r>
           </a:p>
         </p:txBody>
@@ -3511,7 +3454,7 @@
                   <a:srgbClr val="0B3D2E"/>
                 </a:solidFill>
               </a:rPr>
-              <a:t>🔗 Referencias</a:t>
+              <a:t>⚠️ Errores comunes</a:t>
             </a:r>
           </a:p>
         </p:txBody>
@@ -3549,6 +3492,319 @@
                   <a:srgbClr val="22282E"/>
                 </a:solidFill>
               </a:rPr>
+              <a:t>•  Usar MD5/SHA-1 para integridad de seguridad — Rotos; migra a SHA-256/SHA-3</a:t>
+            </a:r>
+          </a:p>
+          <a:p>
+            <a:pPr>
+              <a:spcAft>
+                <a:spcPts val="600"/>
+              </a:spcAft>
+            </a:pPr>
+            <a:r>
+              <a:rPr sz="1500">
+                <a:solidFill>
+                  <a:srgbClr val="22282E"/>
+                </a:solidFill>
+              </a:rPr>
+              <a:t>•  "Ciframos con SHA-256" — Un hash no cifra; usa AES/ChaCha20</a:t>
+            </a:r>
+          </a:p>
+          <a:p>
+            <a:pPr>
+              <a:spcAft>
+                <a:spcPts val="600"/>
+              </a:spcAft>
+            </a:pPr>
+            <a:r>
+              <a:rPr sz="1500">
+                <a:solidFill>
+                  <a:srgbClr val="22282E"/>
+                </a:solidFill>
+              </a:rPr>
+              <a:t>•  hash(clave\ — \</a:t>
+            </a:r>
+          </a:p>
+          <a:p>
+            <a:pPr>
+              <a:spcAft>
+                <a:spcPts val="600"/>
+              </a:spcAft>
+            </a:pPr>
+            <a:r>
+              <a:rPr sz="1500">
+                <a:solidFill>
+                  <a:srgbClr val="22282E"/>
+                </a:solidFill>
+              </a:rPr>
+              <a:t>•  Hash de contraseña con SHA-256 simple — Demasiado rápido; usa Argon2/bcrypt (clase 057)</a:t>
+            </a:r>
+          </a:p>
+          <a:p>
+            <a:pPr>
+              <a:spcAft>
+                <a:spcPts val="600"/>
+              </a:spcAft>
+            </a:pPr>
+            <a:r>
+              <a:rPr sz="1500">
+                <a:solidFill>
+                  <a:srgbClr val="22282E"/>
+                </a:solidFill>
+              </a:rPr>
+              <a:t>•  Comparar hashes con == en contexto sensible — Riesgo de timing; usa comparación constante</a:t>
+            </a:r>
+          </a:p>
+        </p:txBody>
+      </p:sp>
+    </p:spTree>
+  </p:cSld>
+  <p:clrMapOvr>
+    <a:masterClrMapping/>
+  </p:clrMapOvr>
+</p:sld>
+</file>
+
+<file path=ppt/slides/slide13.xml><?xml version="1.0" encoding="utf-8"?>
+<p:sld xmlns:a="http://schemas.openxmlformats.org/drawingml/2006/main" xmlns:p="http://schemas.openxmlformats.org/presentationml/2006/main" xmlns:r="http://schemas.openxmlformats.org/officeDocument/2006/relationships">
+  <p:cSld>
+    <p:spTree>
+      <p:nvGrpSpPr>
+        <p:cNvPr id="1" name=""/>
+        <p:cNvGrpSpPr/>
+        <p:nvPr/>
+      </p:nvGrpSpPr>
+      <p:grpSpPr/>
+      <p:sp>
+        <p:nvSpPr>
+          <p:cNvPr id="2" name="TextBox 1"/>
+          <p:cNvSpPr txBox="1"/>
+          <p:nvPr/>
+        </p:nvSpPr>
+        <p:spPr>
+          <a:xfrm>
+            <a:off x="457200" y="320040"/>
+            <a:ext cx="8229600" cy="822960"/>
+          </a:xfrm>
+          <a:prstGeom prst="rect">
+            <a:avLst/>
+          </a:prstGeom>
+          <a:noFill/>
+        </p:spPr>
+        <p:txBody>
+          <a:bodyPr wrap="square">
+            <a:spAutoFit/>
+          </a:bodyPr>
+          <a:lstStyle/>
+          <a:p>
+            <a:r>
+              <a:rPr sz="2600" b="1">
+                <a:solidFill>
+                  <a:srgbClr val="0B3D2E"/>
+                </a:solidFill>
+              </a:rPr>
+              <a:t>❓ Preguntas frecuentes</a:t>
+            </a:r>
+          </a:p>
+        </p:txBody>
+      </p:sp>
+      <p:sp>
+        <p:nvSpPr>
+          <p:cNvPr id="3" name="TextBox 2"/>
+          <p:cNvSpPr txBox="1"/>
+          <p:nvPr/>
+        </p:nvSpPr>
+        <p:spPr>
+          <a:xfrm>
+            <a:off x="457200" y="1280160"/>
+            <a:ext cx="8229600" cy="4937760"/>
+          </a:xfrm>
+          <a:prstGeom prst="rect">
+            <a:avLst/>
+          </a:prstGeom>
+          <a:noFill/>
+        </p:spPr>
+        <p:txBody>
+          <a:bodyPr wrap="square">
+            <a:spAutoFit/>
+          </a:bodyPr>
+          <a:lstStyle/>
+          <a:p>
+            <a:pPr>
+              <a:spcAft>
+                <a:spcPts val="600"/>
+              </a:spcAft>
+            </a:pPr>
+            <a:r>
+              <a:rPr sz="1500">
+                <a:solidFill>
+                  <a:srgbClr val="22282E"/>
+                </a:solidFill>
+              </a:rPr>
+              <a:t>•  ❓ ¿SHA-256 o SHA-3?</a:t>
+            </a:r>
+          </a:p>
+          <a:p>
+            <a:pPr>
+              <a:spcAft>
+                <a:spcPts val="600"/>
+              </a:spcAft>
+            </a:pPr>
+            <a:r>
+              <a:rPr sz="1500">
+                <a:solidFill>
+                  <a:srgbClr val="22282E"/>
+                </a:solidFill>
+              </a:rPr>
+              <a:t>•  Ambos son seguros. SHA-3 aporta diversidad de diseño e inmunidad a extensión de longitud; SHA-2 sigue siendo perfectamente válido.</a:t>
+            </a:r>
+          </a:p>
+          <a:p>
+            <a:pPr>
+              <a:spcAft>
+                <a:spcPts val="600"/>
+              </a:spcAft>
+            </a:pPr>
+            <a:r>
+              <a:rPr sz="1500">
+                <a:solidFill>
+                  <a:srgbClr val="22282E"/>
+                </a:solidFill>
+              </a:rPr>
+              <a:t>•  ❓ ¿Un hash garantiza que nadie modificó el archivo?</a:t>
+            </a:r>
+          </a:p>
+          <a:p>
+            <a:pPr>
+              <a:spcAft>
+                <a:spcPts val="600"/>
+              </a:spcAft>
+            </a:pPr>
+            <a:r>
+              <a:rPr sz="1500">
+                <a:solidFill>
+                  <a:srgbClr val="22282E"/>
+                </a:solidFill>
+              </a:rPr>
+              <a:t>•  Solo si el hash se obtuvo por un canal confiable; si el atacante controla ambos, puede sustituirlos. Combínalo con firmas.</a:t>
+            </a:r>
+          </a:p>
+          <a:p>
+            <a:pPr>
+              <a:spcAft>
+                <a:spcPts val="600"/>
+              </a:spcAft>
+            </a:pPr>
+            <a:r>
+              <a:rPr sz="1500">
+                <a:solidFill>
+                  <a:srgbClr val="22282E"/>
+                </a:solidFill>
+              </a:rPr>
+              <a:t>•  ❓ ¿Por qué las colisiones importan si "es improbable"?</a:t>
+            </a:r>
+          </a:p>
+          <a:p>
+            <a:pPr>
+              <a:spcAft>
+                <a:spcPts val="600"/>
+              </a:spcAft>
+            </a:pPr>
+            <a:r>
+              <a:rPr sz="1500">
+                <a:solidFill>
+                  <a:srgbClr val="22282E"/>
+                </a:solidFill>
+              </a:rPr>
+              <a:t>•  Porque atacantes las fabrican intencionadamente (SHAttered); afectan firmas y control de versiones.</a:t>
+            </a:r>
+          </a:p>
+        </p:txBody>
+      </p:sp>
+    </p:spTree>
+  </p:cSld>
+  <p:clrMapOvr>
+    <a:masterClrMapping/>
+  </p:clrMapOvr>
+</p:sld>
+</file>
+
+<file path=ppt/slides/slide14.xml><?xml version="1.0" encoding="utf-8"?>
+<p:sld xmlns:a="http://schemas.openxmlformats.org/drawingml/2006/main" xmlns:p="http://schemas.openxmlformats.org/presentationml/2006/main" xmlns:r="http://schemas.openxmlformats.org/officeDocument/2006/relationships">
+  <p:cSld>
+    <p:spTree>
+      <p:nvGrpSpPr>
+        <p:cNvPr id="1" name=""/>
+        <p:cNvGrpSpPr/>
+        <p:nvPr/>
+      </p:nvGrpSpPr>
+      <p:grpSpPr/>
+      <p:sp>
+        <p:nvSpPr>
+          <p:cNvPr id="2" name="TextBox 1"/>
+          <p:cNvSpPr txBox="1"/>
+          <p:nvPr/>
+        </p:nvSpPr>
+        <p:spPr>
+          <a:xfrm>
+            <a:off x="457200" y="320040"/>
+            <a:ext cx="8229600" cy="822960"/>
+          </a:xfrm>
+          <a:prstGeom prst="rect">
+            <a:avLst/>
+          </a:prstGeom>
+          <a:noFill/>
+        </p:spPr>
+        <p:txBody>
+          <a:bodyPr wrap="square">
+            <a:spAutoFit/>
+          </a:bodyPr>
+          <a:lstStyle/>
+          <a:p>
+            <a:r>
+              <a:rPr sz="2600" b="1">
+                <a:solidFill>
+                  <a:srgbClr val="0B3D2E"/>
+                </a:solidFill>
+              </a:rPr>
+              <a:t>🔗 Referencias</a:t>
+            </a:r>
+          </a:p>
+        </p:txBody>
+      </p:sp>
+      <p:sp>
+        <p:nvSpPr>
+          <p:cNvPr id="3" name="TextBox 2"/>
+          <p:cNvSpPr txBox="1"/>
+          <p:nvPr/>
+        </p:nvSpPr>
+        <p:spPr>
+          <a:xfrm>
+            <a:off x="457200" y="1280160"/>
+            <a:ext cx="8229600" cy="4937760"/>
+          </a:xfrm>
+          <a:prstGeom prst="rect">
+            <a:avLst/>
+          </a:prstGeom>
+          <a:noFill/>
+        </p:spPr>
+        <p:txBody>
+          <a:bodyPr wrap="square">
+            <a:spAutoFit/>
+          </a:bodyPr>
+          <a:lstStyle/>
+          <a:p>
+            <a:pPr>
+              <a:spcAft>
+                <a:spcPts val="600"/>
+              </a:spcAft>
+            </a:pPr>
+            <a:r>
+              <a:rPr sz="1500">
+                <a:solidFill>
+                  <a:srgbClr val="22282E"/>
+                </a:solidFill>
+              </a:rPr>
               <a:t>•  NIST FIPS 180-4 (SHA-2) — &lt;https://csrc.nist.gov/publications/detail/fips/180/4/final&gt;</a:t>
             </a:r>
           </a:p>
@@ -3599,6 +3855,81 @@
           </a:p>
         </p:txBody>
       </p:sp>
+    </p:spTree>
+  </p:cSld>
+  <p:clrMapOvr>
+    <a:masterClrMapping/>
+  </p:clrMapOvr>
+</p:sld>
+</file>
+
+<file path=ppt/slides/slide15.xml><?xml version="1.0" encoding="utf-8"?>
+<p:sld xmlns:a="http://schemas.openxmlformats.org/drawingml/2006/main" xmlns:p="http://schemas.openxmlformats.org/presentationml/2006/main" xmlns:r="http://schemas.openxmlformats.org/officeDocument/2006/relationships">
+  <p:cSld>
+    <p:spTree>
+      <p:nvGrpSpPr>
+        <p:cNvPr id="1" name=""/>
+        <p:cNvGrpSpPr/>
+        <p:nvPr/>
+      </p:nvGrpSpPr>
+      <p:grpSpPr/>
+      <p:sp>
+        <p:nvSpPr>
+          <p:cNvPr id="2" name="TextBox 1"/>
+          <p:cNvSpPr txBox="1"/>
+          <p:nvPr/>
+        </p:nvSpPr>
+        <p:spPr>
+          <a:xfrm>
+            <a:off x="457200" y="274320"/>
+            <a:ext cx="8229600" cy="640080"/>
+          </a:xfrm>
+          <a:prstGeom prst="rect">
+            <a:avLst/>
+          </a:prstGeom>
+          <a:noFill/>
+        </p:spPr>
+        <p:txBody>
+          <a:bodyPr wrap="square">
+            <a:spAutoFit/>
+          </a:bodyPr>
+          <a:lstStyle/>
+          <a:p>
+            <a:r>
+              <a:rPr sz="2200" b="1">
+                <a:solidFill>
+                  <a:srgbClr val="0B3D2E"/>
+                </a:solidFill>
+              </a:rPr>
+              <a:t>Diagrama de la clase</a:t>
+            </a:r>
+          </a:p>
+        </p:txBody>
+      </p:sp>
+      <p:pic>
+        <p:nvPicPr>
+          <p:cNvPr id="3" name="Picture 2" descr="9f5c210a5b12cc32.png"/>
+          <p:cNvPicPr>
+            <a:picLocks noChangeAspect="1"/>
+          </p:cNvPicPr>
+          <p:nvPr/>
+        </p:nvPicPr>
+        <p:blipFill>
+          <a:blip r:embed="rId2"/>
+          <a:stretch>
+            <a:fillRect/>
+          </a:stretch>
+        </p:blipFill>
+        <p:spPr>
+          <a:xfrm>
+            <a:off x="708623" y="1097280"/>
+            <a:ext cx="7726754" cy="5303520"/>
+          </a:xfrm>
+          <a:prstGeom prst="rect">
+            <a:avLst/>
+          </a:prstGeom>
+        </p:spPr>
+      </p:pic>
     </p:spTree>
   </p:cSld>
   <p:clrMapOvr>
@@ -3683,7 +4014,7 @@
                   <a:srgbClr val="22282E"/>
                 </a:solidFill>
               </a:rPr>
-              <a:t>•  Comprender qué es una función hash criptográfica, qué tres propiedades debe cumplir (resistencia a preimagen, segunda preimagen y colisión), por qué MD5 y SHA-1 están rotos, y en qué se diferencian SHA-2, SHA-3 (Keccak) y BLAKE2/3. El alumno aprenderá para qué sirven realmente los hashes y para qué no (no cifran, no protegen contraseñas por sí solos).</a:t>
+              <a:t>•  Comprender qué es una función hash criptográfica, qué tres propiedades debe cumplir (resistencia a preimagen, segunda preimagen y colisión), por qué MD5 y SHA-1 están rotos, y en qué se diferencian…</a:t>
             </a:r>
           </a:p>
         </p:txBody>
@@ -4077,7 +4408,7 @@
                   <a:srgbClr val="0B3D2E"/>
                 </a:solidFill>
               </a:rPr>
-              <a:t>📖 Definiciones y características</a:t>
+              <a:t>🧠 Explicación en profundidad</a:t>
             </a:r>
           </a:p>
         </p:txBody>
@@ -4115,97 +4446,97 @@
                   <a:srgbClr val="22282E"/>
                 </a:solidFill>
               </a:rPr>
-              <a:t>•  Función hash criptográfica: transforma una entrada arbitraria en una salida fija (digest). Característica: determinista, rápida, unidireccional.</a:t>
-            </a:r>
-          </a:p>
-          <a:p>
-            <a:pPr>
-              <a:spcAft>
-                <a:spcPts val="600"/>
-              </a:spcAft>
-            </a:pPr>
-            <a:r>
-              <a:rPr sz="1500">
-                <a:solidFill>
-                  <a:srgbClr val="22282E"/>
-                </a:solidFill>
-              </a:rPr>
-              <a:t>•  Resistencia a preimagen: dado h, es inviable hallar m con hash(m)=h.</a:t>
-            </a:r>
-          </a:p>
-          <a:p>
-            <a:pPr>
-              <a:spcAft>
-                <a:spcPts val="600"/>
-              </a:spcAft>
-            </a:pPr>
-            <a:r>
-              <a:rPr sz="1500">
-                <a:solidFill>
-                  <a:srgbClr val="22282E"/>
-                </a:solidFill>
-              </a:rPr>
-              <a:t>•  Resistencia a segunda preimagen: dado m1, es inviable hallar m2≠m1 con igual hash.</a:t>
-            </a:r>
-          </a:p>
-          <a:p>
-            <a:pPr>
-              <a:spcAft>
-                <a:spcPts val="600"/>
-              </a:spcAft>
-            </a:pPr>
-            <a:r>
-              <a:rPr sz="1500">
-                <a:solidFill>
-                  <a:srgbClr val="22282E"/>
-                </a:solidFill>
-              </a:rPr>
-              <a:t>•  Resistencia a colisiones: es inviable hallar cualquier par m1≠m2 con igual hash (limitada por el cumpleaños: ~2^(n/2)).</a:t>
-            </a:r>
-          </a:p>
-          <a:p>
-            <a:pPr>
-              <a:spcAft>
-                <a:spcPts val="600"/>
-              </a:spcAft>
-            </a:pPr>
-            <a:r>
-              <a:rPr sz="1500">
-                <a:solidFill>
-                  <a:srgbClr val="22282E"/>
-                </a:solidFill>
-              </a:rPr>
-              <a:t>•  Efecto avalancha: un cambio mínimo en la entrada altera drásticamente la salida.</a:t>
-            </a:r>
-          </a:p>
-          <a:p>
-            <a:pPr>
-              <a:spcAft>
-                <a:spcPts val="600"/>
-              </a:spcAft>
-            </a:pPr>
-            <a:r>
-              <a:rPr sz="1500">
-                <a:solidFill>
-                  <a:srgbClr val="22282E"/>
-                </a:solidFill>
-              </a:rPr>
-              <a:t>•  SHA-2: familia (SHA-256/384/512) con construcción Merkle-Damgård. Segura y ubicua.</a:t>
-            </a:r>
-          </a:p>
-          <a:p>
-            <a:pPr>
-              <a:spcAft>
-                <a:spcPts val="600"/>
-              </a:spcAft>
-            </a:pPr>
-            <a:r>
-              <a:rPr sz="1500">
-                <a:solidFill>
-                  <a:srgbClr val="22282E"/>
-                </a:solidFill>
-              </a:rPr>
-              <a:t>•  SHA-3 / Keccak: construcción de esponja, inmune a extensión de longitud. BLAKE2/3: rápidas y modernas.</a:t>
+              <a:t>•  Una función hash criptográfica toma una entrada de cualquier tamaño y produce una salida</a:t>
+            </a:r>
+          </a:p>
+          <a:p>
+            <a:pPr>
+              <a:spcAft>
+                <a:spcPts val="600"/>
+              </a:spcAft>
+            </a:pPr>
+            <a:r>
+              <a:rPr sz="1500">
+                <a:solidFill>
+                  <a:srgbClr val="22282E"/>
+                </a:solidFill>
+              </a:rPr>
+              <a:t>•  de tamaño fijo —el digest— de forma determinista. Y aquí conviene desactivar de entrada</a:t>
+            </a:r>
+          </a:p>
+          <a:p>
+            <a:pPr>
+              <a:spcAft>
+                <a:spcPts val="600"/>
+              </a:spcAft>
+            </a:pPr>
+            <a:r>
+              <a:rPr sz="1500">
+                <a:solidFill>
+                  <a:srgbClr val="22282E"/>
+                </a:solidFill>
+              </a:rPr>
+              <a:t>•  el malentendido más caro de toda la criptografía aplicada: un hash no es cifrado. No</a:t>
+            </a:r>
+          </a:p>
+          <a:p>
+            <a:pPr>
+              <a:spcAft>
+                <a:spcPts val="600"/>
+              </a:spcAft>
+            </a:pPr>
+            <a:r>
+              <a:rPr sz="1500">
+                <a:solidFill>
+                  <a:srgbClr val="22282E"/>
+                </a:solidFill>
+              </a:rPr>
+              <a:t>•  hay clave y no se puede invertir, porque la operación destruye información: infinitas</a:t>
+            </a:r>
+          </a:p>
+          <a:p>
+            <a:pPr>
+              <a:spcAft>
+                <a:spcPts val="600"/>
+              </a:spcAft>
+            </a:pPr>
+            <a:r>
+              <a:rPr sz="1500">
+                <a:solidFill>
+                  <a:srgbClr val="22282E"/>
+                </a:solidFill>
+              </a:rPr>
+              <a:t>•  entradas comparten un mismo digest. "Desencriptar un MD5" no significa nada; lo que hacen</a:t>
+            </a:r>
+          </a:p>
+          <a:p>
+            <a:pPr>
+              <a:spcAft>
+                <a:spcPts val="600"/>
+              </a:spcAft>
+            </a:pPr>
+            <a:r>
+              <a:rPr sz="1500">
+                <a:solidFill>
+                  <a:srgbClr val="22282E"/>
+                </a:solidFill>
+              </a:rPr>
+              <a:t>•  las herramientas de crackeo es hashear candidatos hasta encontrar uno que coincida, que</a:t>
+            </a:r>
+          </a:p>
+          <a:p>
+            <a:pPr>
+              <a:spcAft>
+                <a:spcPts val="600"/>
+              </a:spcAft>
+            </a:pPr>
+            <a:r>
+              <a:rPr sz="1500">
+                <a:solidFill>
+                  <a:srgbClr val="22282E"/>
+                </a:solidFill>
+              </a:rPr>
+              <a:t>•  es un problema completamente distinto.</a:t>
             </a:r>
           </a:p>
         </p:txBody>
@@ -4256,7 +4587,7 @@
                   <a:srgbClr val="0B3D2E"/>
                 </a:solidFill>
               </a:rPr>
-              <a:t>🧰 Herramientas y preparación</a:t>
+              <a:t>📖 Definiciones y características</a:t>
             </a:r>
           </a:p>
         </p:txBody>
@@ -4294,52 +4625,97 @@
                   <a:srgbClr val="22282E"/>
                 </a:solidFill>
               </a:rPr>
-              <a:t>•  openssl version</a:t>
-            </a:r>
-          </a:p>
-          <a:p>
-            <a:pPr>
-              <a:spcAft>
-                <a:spcPts val="600"/>
-              </a:spcAft>
-            </a:pPr>
-            <a:r>
-              <a:rPr sz="1500">
-                <a:solidFill>
-                  <a:srgbClr val="22282E"/>
-                </a:solidFill>
-              </a:rPr>
-              <a:t>•  sha256sum --version 2&gt;/dev/null || echo "usa openssl dgst"</a:t>
-            </a:r>
-          </a:p>
-          <a:p>
-            <a:pPr>
-              <a:spcAft>
-                <a:spcPts val="600"/>
-              </a:spcAft>
-            </a:pPr>
-            <a:r>
-              <a:rPr sz="1500">
-                <a:solidFill>
-                  <a:srgbClr val="22282E"/>
-                </a:solidFill>
-              </a:rPr>
-              <a:t>•  pip install cryptography</a:t>
-            </a:r>
-          </a:p>
-          <a:p>
-            <a:pPr>
-              <a:spcAft>
-                <a:spcPts val="600"/>
-              </a:spcAft>
-            </a:pPr>
-            <a:r>
-              <a:rPr sz="1500">
-                <a:solidFill>
-                  <a:srgbClr val="22282E"/>
-                </a:solidFill>
-              </a:rPr>
-              <a:t>•  Todo local. Los hashes se calculan sobre datos propios.</a:t>
+              <a:t>•  Función hash criptográfica: transforma una entrada arbitraria en una salida fija (digest). Característica: determinista, rápida, unidireccional.</a:t>
+            </a:r>
+          </a:p>
+          <a:p>
+            <a:pPr>
+              <a:spcAft>
+                <a:spcPts val="600"/>
+              </a:spcAft>
+            </a:pPr>
+            <a:r>
+              <a:rPr sz="1500">
+                <a:solidFill>
+                  <a:srgbClr val="22282E"/>
+                </a:solidFill>
+              </a:rPr>
+              <a:t>•  Resistencia a preimagen: dado h, es inviable hallar m con hash(m)=h.</a:t>
+            </a:r>
+          </a:p>
+          <a:p>
+            <a:pPr>
+              <a:spcAft>
+                <a:spcPts val="600"/>
+              </a:spcAft>
+            </a:pPr>
+            <a:r>
+              <a:rPr sz="1500">
+                <a:solidFill>
+                  <a:srgbClr val="22282E"/>
+                </a:solidFill>
+              </a:rPr>
+              <a:t>•  Resistencia a segunda preimagen: dado m1, es inviable hallar m2≠m1 con igual hash.</a:t>
+            </a:r>
+          </a:p>
+          <a:p>
+            <a:pPr>
+              <a:spcAft>
+                <a:spcPts val="600"/>
+              </a:spcAft>
+            </a:pPr>
+            <a:r>
+              <a:rPr sz="1500">
+                <a:solidFill>
+                  <a:srgbClr val="22282E"/>
+                </a:solidFill>
+              </a:rPr>
+              <a:t>•  Resistencia a colisiones: es inviable hallar cualquier par m1≠m2 con igual hash (limitada por el cumpleaños: ~2^(n/2)).</a:t>
+            </a:r>
+          </a:p>
+          <a:p>
+            <a:pPr>
+              <a:spcAft>
+                <a:spcPts val="600"/>
+              </a:spcAft>
+            </a:pPr>
+            <a:r>
+              <a:rPr sz="1500">
+                <a:solidFill>
+                  <a:srgbClr val="22282E"/>
+                </a:solidFill>
+              </a:rPr>
+              <a:t>•  Efecto avalancha: un cambio mínimo en la entrada altera drásticamente la salida.</a:t>
+            </a:r>
+          </a:p>
+          <a:p>
+            <a:pPr>
+              <a:spcAft>
+                <a:spcPts val="600"/>
+              </a:spcAft>
+            </a:pPr>
+            <a:r>
+              <a:rPr sz="1500">
+                <a:solidFill>
+                  <a:srgbClr val="22282E"/>
+                </a:solidFill>
+              </a:rPr>
+              <a:t>•  SHA-2: familia (SHA-256/384/512) con construcción Merkle-Damgård. Segura y ubicua.</a:t>
+            </a:r>
+          </a:p>
+          <a:p>
+            <a:pPr>
+              <a:spcAft>
+                <a:spcPts val="600"/>
+              </a:spcAft>
+            </a:pPr>
+            <a:r>
+              <a:rPr sz="1500">
+                <a:solidFill>
+                  <a:srgbClr val="22282E"/>
+                </a:solidFill>
+              </a:rPr>
+              <a:t>•  SHA-3 / Keccak: construcción de esponja, inmune a extensión de longitud. BLAKE2/3: rápidas y modernas.</a:t>
             </a:r>
           </a:p>
         </p:txBody>
@@ -4390,7 +4766,7 @@
                   <a:srgbClr val="0B3D2E"/>
                 </a:solidFill>
               </a:rPr>
-              <a:t>🧪 Laboratorio guiado</a:t>
+              <a:t>📔 Glosario</a:t>
             </a:r>
           </a:p>
         </p:txBody>
@@ -4428,97 +4804,97 @@
                   <a:srgbClr val="22282E"/>
                 </a:solidFill>
               </a:rPr>
-              <a:t>•  Calcula hashes de una cadena con varias familias:</a:t>
-            </a:r>
-          </a:p>
-          <a:p>
-            <a:pPr>
-              <a:spcAft>
-                <a:spcPts val="600"/>
-              </a:spcAft>
-            </a:pPr>
-            <a:r>
-              <a:rPr sz="1500">
-                <a:solidFill>
-                  <a:srgbClr val="22282E"/>
-                </a:solidFill>
-              </a:rPr>
-              <a:t>•  echo -n "hola" | openssl dgst -md5</a:t>
-            </a:r>
-          </a:p>
-          <a:p>
-            <a:pPr>
-              <a:spcAft>
-                <a:spcPts val="600"/>
-              </a:spcAft>
-            </a:pPr>
-            <a:r>
-              <a:rPr sz="1500">
-                <a:solidFill>
-                  <a:srgbClr val="22282E"/>
-                </a:solidFill>
-              </a:rPr>
-              <a:t>•  echo -n "hola" | openssl dgst -sha1</a:t>
-            </a:r>
-          </a:p>
-          <a:p>
-            <a:pPr>
-              <a:spcAft>
-                <a:spcPts val="600"/>
-              </a:spcAft>
-            </a:pPr>
-            <a:r>
-              <a:rPr sz="1500">
-                <a:solidFill>
-                  <a:srgbClr val="22282E"/>
-                </a:solidFill>
-              </a:rPr>
-              <a:t>•  echo -n "hola" | openssl dgst -sha256</a:t>
-            </a:r>
-          </a:p>
-          <a:p>
-            <a:pPr>
-              <a:spcAft>
-                <a:spcPts val="600"/>
-              </a:spcAft>
-            </a:pPr>
-            <a:r>
-              <a:rPr sz="1500">
-                <a:solidFill>
-                  <a:srgbClr val="22282E"/>
-                </a:solidFill>
-              </a:rPr>
-              <a:t>•  echo -n "hola" | openssl dgst -sha3-256</a:t>
-            </a:r>
-          </a:p>
-          <a:p>
-            <a:pPr>
-              <a:spcAft>
-                <a:spcPts val="600"/>
-              </a:spcAft>
-            </a:pPr>
-            <a:r>
-              <a:rPr sz="1500">
-                <a:solidFill>
-                  <a:srgbClr val="22282E"/>
-                </a:solidFill>
-              </a:rPr>
-              <a:t>•  Efecto avalancha: cambia una letra (hola → Hola) y compara el SHA-256; observa que casi todos los bits cambian.</a:t>
-            </a:r>
-          </a:p>
-          <a:p>
-            <a:pPr>
-              <a:spcAft>
-                <a:spcPts val="600"/>
-              </a:spcAft>
-            </a:pPr>
-            <a:r>
-              <a:rPr sz="1500">
-                <a:solidFill>
-                  <a:srgbClr val="22282E"/>
-                </a:solidFill>
-              </a:rPr>
-              <a:t>•  Colisión de MD5 (histórica). Descarga los famosos bloques de colisión de MD5 (p. ej. los PDF de Marc Stevens) y verifica con md5sum que dos archivos distintos comparten hash. Nunca uses MD5 para integridad.</a:t>
+              <a:t>•  Término — Definición concisa</a:t>
+            </a:r>
+          </a:p>
+          <a:p>
+            <a:pPr>
+              <a:spcAft>
+                <a:spcPts val="600"/>
+              </a:spcAft>
+            </a:pPr>
+            <a:r>
+              <a:rPr sz="1500">
+                <a:solidFill>
+                  <a:srgbClr val="22282E"/>
+                </a:solidFill>
+              </a:rPr>
+              <a:t>•  Función hash criptográfica — Salida de tamaño fijo, determinista y no invertible</a:t>
+            </a:r>
+          </a:p>
+          <a:p>
+            <a:pPr>
+              <a:spcAft>
+                <a:spcPts val="600"/>
+              </a:spcAft>
+            </a:pPr>
+            <a:r>
+              <a:rPr sz="1500">
+                <a:solidFill>
+                  <a:srgbClr val="22282E"/>
+                </a:solidFill>
+              </a:rPr>
+              <a:t>•  Digest — Resultado de aplicar la función hash</a:t>
+            </a:r>
+          </a:p>
+          <a:p>
+            <a:pPr>
+              <a:spcAft>
+                <a:spcPts val="600"/>
+              </a:spcAft>
+            </a:pPr>
+            <a:r>
+              <a:rPr sz="1500">
+                <a:solidFill>
+                  <a:srgbClr val="22282E"/>
+                </a:solidFill>
+              </a:rPr>
+              <a:t>•  Preimagen — Encontrar una entrada que produzca un digest dado</a:t>
+            </a:r>
+          </a:p>
+          <a:p>
+            <a:pPr>
+              <a:spcAft>
+                <a:spcPts val="600"/>
+              </a:spcAft>
+            </a:pPr>
+            <a:r>
+              <a:rPr sz="1500">
+                <a:solidFill>
+                  <a:srgbClr val="22282E"/>
+                </a:solidFill>
+              </a:rPr>
+              <a:t>•  Segunda preimagen — Encontrar otra entrada con el mismo digest que una dada</a:t>
+            </a:r>
+          </a:p>
+          <a:p>
+            <a:pPr>
+              <a:spcAft>
+                <a:spcPts val="600"/>
+              </a:spcAft>
+            </a:pPr>
+            <a:r>
+              <a:rPr sz="1500">
+                <a:solidFill>
+                  <a:srgbClr val="22282E"/>
+                </a:solidFill>
+              </a:rPr>
+              <a:t>•  Colisión — Dos entradas cualesquiera con el mismo digest</a:t>
+            </a:r>
+          </a:p>
+          <a:p>
+            <a:pPr>
+              <a:spcAft>
+                <a:spcPts val="600"/>
+              </a:spcAft>
+            </a:pPr>
+            <a:r>
+              <a:rPr sz="1500">
+                <a:solidFill>
+                  <a:srgbClr val="22282E"/>
+                </a:solidFill>
+              </a:rPr>
+              <a:t>•  Efecto avalancha — Un bit de entrada cambia ~la mitad de los de salida</a:t>
             </a:r>
           </a:p>
         </p:txBody>
@@ -4569,7 +4945,7 @@
                   <a:srgbClr val="0B3D2E"/>
                 </a:solidFill>
               </a:rPr>
-              <a:t>✍️ Ejercicios</a:t>
+              <a:t>🧰 Herramientas y preparación</a:t>
             </a:r>
           </a:p>
         </p:txBody>
@@ -4607,82 +4983,7 @@
                   <a:srgbClr val="22282E"/>
                 </a:solidFill>
               </a:rPr>
-              <a:t>•  Calcula cuántos hashes necesitas para una colisión al 50 % en SHA-256 (paradoja del cumpleaños).</a:t>
-            </a:r>
-          </a:p>
-          <a:p>
-            <a:pPr>
-              <a:spcAft>
-                <a:spcPts val="600"/>
-              </a:spcAft>
-            </a:pPr>
-            <a:r>
-              <a:rPr sz="1500">
-                <a:solidFill>
-                  <a:srgbClr val="22282E"/>
-                </a:solidFill>
-              </a:rPr>
-              <a:t>•  Verifica la integridad de una descarga comparando su SHA-256 publicado.</a:t>
-            </a:r>
-          </a:p>
-          <a:p>
-            <a:pPr>
-              <a:spcAft>
-                <a:spcPts val="600"/>
-              </a:spcAft>
-            </a:pPr>
-            <a:r>
-              <a:rPr sz="1500">
-                <a:solidFill>
-                  <a:srgbClr val="22282E"/>
-                </a:solidFill>
-              </a:rPr>
-              <a:t>•  Explica por qué un hash no sirve para cifrar (no es reversible ni tiene clave).</a:t>
-            </a:r>
-          </a:p>
-          <a:p>
-            <a:pPr>
-              <a:spcAft>
-                <a:spcPts val="600"/>
-              </a:spcAft>
-            </a:pPr>
-            <a:r>
-              <a:rPr sz="1500">
-                <a:solidFill>
-                  <a:srgbClr val="22282E"/>
-                </a:solidFill>
-              </a:rPr>
-              <a:t>•  Compara la velocidad de SHA-256, SHA3-256 y BLAKE2b en tu máquina.</a:t>
-            </a:r>
-          </a:p>
-          <a:p>
-            <a:pPr>
-              <a:spcAft>
-                <a:spcPts val="600"/>
-              </a:spcAft>
-            </a:pPr>
-            <a:r>
-              <a:rPr sz="1500">
-                <a:solidFill>
-                  <a:srgbClr val="22282E"/>
-                </a:solidFill>
-              </a:rPr>
-              <a:t>•  Investiga el ataque SHAttered contra SHA-1 y su impacto en Git.</a:t>
-            </a:r>
-          </a:p>
-          <a:p>
-            <a:pPr>
-              <a:spcAft>
-                <a:spcPts val="600"/>
-              </a:spcAft>
-            </a:pPr>
-            <a:r>
-              <a:rPr sz="1500">
-                <a:solidFill>
-                  <a:srgbClr val="22282E"/>
-                </a:solidFill>
-              </a:rPr>
-              <a:t>•  Diseña un esquema de "prueba de descarga" con árbol de Merkle.</a:t>
+              <a:t>•  Todo local. Los hashes se calculan sobre datos propios.</a:t>
             </a:r>
           </a:p>
         </p:txBody>
@@ -4733,7 +5034,7 @@
                   <a:srgbClr val="0B3D2E"/>
                 </a:solidFill>
               </a:rPr>
-              <a:t>📝 Reto verificable</a:t>
+              <a:t>🧪 Laboratorio guiado</a:t>
             </a:r>
           </a:p>
         </p:txBody>
@@ -4771,7 +5072,67 @@
                   <a:srgbClr val="22282E"/>
                 </a:solidFill>
               </a:rPr>
-              <a:t>•  Construye un verificador de integridad que, dado un directorio, genere un manifiesto con el SHA-256 de cada archivo y luego detecte cualquier alteración. Criterio de aceptación: si modificas un solo byte de cualquier archivo, tu verificador lo reporta indicando la ruta afectada.</a:t>
+              <a:t>•  Calcula hashes de una cadena con varias familias:</a:t>
+            </a:r>
+          </a:p>
+          <a:p>
+            <a:pPr>
+              <a:spcAft>
+                <a:spcPts val="600"/>
+              </a:spcAft>
+            </a:pPr>
+            <a:r>
+              <a:rPr sz="1500">
+                <a:solidFill>
+                  <a:srgbClr val="22282E"/>
+                </a:solidFill>
+              </a:rPr>
+              <a:t>•  Efecto avalancha: cambia una letra (hola → Hola) y compara el SHA-256; observa que casi todos los bits cambian.</a:t>
+            </a:r>
+          </a:p>
+          <a:p>
+            <a:pPr>
+              <a:spcAft>
+                <a:spcPts val="600"/>
+              </a:spcAft>
+            </a:pPr>
+            <a:r>
+              <a:rPr sz="1500">
+                <a:solidFill>
+                  <a:srgbClr val="22282E"/>
+                </a:solidFill>
+              </a:rPr>
+              <a:t>•  Colisión de MD5 (histórica). Descarga los famosos bloques de colisión de MD5 (p. ej. los PDF de Marc Stevens) y verifica con md5sum que dos archivos distintos comparten hash. Nunca uses MD5 para…</a:t>
+            </a:r>
+          </a:p>
+          <a:p>
+            <a:pPr>
+              <a:spcAft>
+                <a:spcPts val="600"/>
+              </a:spcAft>
+            </a:pPr>
+            <a:r>
+              <a:rPr sz="1500">
+                <a:solidFill>
+                  <a:srgbClr val="22282E"/>
+                </a:solidFill>
+              </a:rPr>
+              <a:t>•  Integridad de archivos: genera sha256sum .iso &gt; SHA256SUMS y verifica con sha256sum -c SHA256SUMS.</a:t>
+            </a:r>
+          </a:p>
+          <a:p>
+            <a:pPr>
+              <a:spcAft>
+                <a:spcPts val="600"/>
+              </a:spcAft>
+            </a:pPr>
+            <a:r>
+              <a:rPr sz="1500">
+                <a:solidFill>
+                  <a:srgbClr val="22282E"/>
+                </a:solidFill>
+              </a:rPr>
+              <a:t>•  Extensión de longitud (concepto). Explica por qué hash(clave || mensaje) con SHA-256 es vulnerable a extensión y por qué HMAC (clase 052) lo resuelve.</a:t>
             </a:r>
           </a:p>
         </p:txBody>
